--- a/curso_es/pptx/S57.pptx
+++ b/curso_es/pptx/S57.pptx
@@ -3718,7 +3718,7 @@
                 </a:solidFill>
                 <a:latin typeface="Fredoka"/>
               </a:rPr>
-              <a:t>Caso 1 · Dylan y el jugador</a:t>
+              <a:t>Caso 1 · El jugador malísimo</a:t>
             </a:r>
           </a:p>
         </p:txBody>
@@ -3800,7 +3800,7 @@
                 </a:solidFill>
                 <a:latin typeface="Nunito Sans"/>
               </a:rPr>
-              <a:t>Dylan dijo que un jugador era malísimo porque lo vio fallar en un partido. Luego vio sus datos de toda la temporada: era de los mejores.</a:t>
+              <a:t>Un chico dijo que un jugador era malísimo porque lo vio fallar en un partido. Luego vio sus datos de toda la temporada: era de los mejores.</a:t>
             </a:r>
           </a:p>
         </p:txBody>
@@ -4027,7 +4027,7 @@
                 </a:solidFill>
                 <a:latin typeface="Fredoka"/>
               </a:rPr>
-              <a:t>Caso 2 · Yasmin, la veleta</a:t>
+              <a:t>Caso 2 · La veleta</a:t>
             </a:r>
           </a:p>
         </p:txBody>
@@ -4109,7 +4109,7 @@
                 </a:solidFill>
                 <a:latin typeface="Nunito Sans"/>
               </a:rPr>
-              <a:t>Yasmin opina que el uniforme es buena idea. Oye a una amiga y opina lo contrario. Oye a otra y vuelve a cambiar.</a:t>
+              <a:t>Una chica opina que el uniforme es buena idea. Oye a una amiga y opina lo contrario. Oye a otra y vuelve a cambiar.</a:t>
             </a:r>
           </a:p>
         </p:txBody>
@@ -4418,7 +4418,7 @@
                 </a:solidFill>
                 <a:latin typeface="Nunito Sans"/>
               </a:rPr>
-              <a:t>Leire dice que copiar en un examen no está bien. Su cuadrilla insiste: «Cambia de opinión, no seas cabezota. ¿No dicen que cambiar es de sabios?».</a:t>
+              <a:t>Una chica dice que copiar en un examen no está bien. Su cuadrilla insiste: «Cambia de opinión, no seas cabezota. ¿No dicen que cambiar es de sabios?».</a:t>
             </a:r>
           </a:p>
         </p:txBody>
@@ -4466,7 +4466,7 @@
                 </a:solidFill>
                 <a:latin typeface="Nunito Sans"/>
               </a:rPr>
-              <a:t>Cambiar de opinión es una virtud. ¿Debería cambiar Leire?</a:t>
+              <a:t>Cambiar de opinión es una virtud. ¿Debería cambiar esa chica?</a:t>
             </a:r>
           </a:p>
           <a:p>
@@ -6471,7 +6471,7 @@
                 </a:solidFill>
                 <a:latin typeface="Nunito Sans"/>
               </a:rPr>
-              <a:t>Dylan dijo en el grupo de WhatsApp que un jugador era malísimo. Luego vio sus datos de la temporada: era de los mejores. No dijo nada.</a:t>
+              <a:t>Un chico dijo en el grupo de WhatsApp que un jugador era malísimo. Luego vio sus datos de la temporada: era de los mejores. No dijo nada.</a:t>
             </a:r>
           </a:p>
         </p:txBody>
